--- a/Output/Planulae_plots.pptx
+++ b/Output/Planulae_plots.pptx
@@ -7609,29 +7609,6 @@
           </a:p>
         </p:txBody>
       </p:sp>
-      <p:pic>
-        <p:nvPicPr>
-          <p:cNvPr id="84" name="Picture 6"/>
-          <p:cNvPicPr/>
-          <p:nvPr/>
-        </p:nvPicPr>
-        <p:blipFill>
-          <a:blip r:embed="rId2"/>
-          <a:stretch/>
-        </p:blipFill>
-        <p:spPr>
-          <a:xfrm>
-            <a:off x="643320" y="2105280"/>
-            <a:ext cx="5294520" cy="2647080"/>
-          </a:xfrm>
-          <a:prstGeom prst="rect">
-            <a:avLst/>
-          </a:prstGeom>
-          <a:ln w="0">
-            <a:noFill/>
-          </a:ln>
-        </p:spPr>
-      </p:pic>
       <p:sp>
         <p:nvSpPr>
           <p:cNvPr id="85" name="Straight Connector 15"/>
@@ -7678,6 +7655,42 @@
             <a:extLst>
               <a:ext uri="{FF2B5EF4-FFF2-40B4-BE49-F238E27FC236}">
                 <a16:creationId xmlns:a16="http://schemas.microsoft.com/office/drawing/2014/main" id="{BD844ABB-38A6-5573-AB70-C628F8670BD8}"/>
+              </a:ext>
+            </a:extLst>
+          </p:cNvPr>
+          <p:cNvPicPr>
+            <a:picLocks noChangeAspect="1"/>
+          </p:cNvPicPr>
+          <p:nvPr/>
+        </p:nvPicPr>
+        <p:blipFill>
+          <a:blip r:embed="rId2" cstate="print">
+            <a:extLst>
+              <a:ext uri="{28A0092B-C50C-407E-A947-70E740481C1C}">
+                <a14:useLocalDpi xmlns:a14="http://schemas.microsoft.com/office/drawing/2010/main" val="0"/>
+              </a:ext>
+            </a:extLst>
+          </a:blip>
+          <a:stretch>
+            <a:fillRect/>
+          </a:stretch>
+        </p:blipFill>
+        <p:spPr>
+          <a:xfrm>
+            <a:off x="6221880" y="685614"/>
+            <a:ext cx="4572009" cy="5486411"/>
+          </a:xfrm>
+          <a:prstGeom prst="rect">
+            <a:avLst/>
+          </a:prstGeom>
+        </p:spPr>
+      </p:pic>
+      <p:pic>
+        <p:nvPicPr>
+          <p:cNvPr id="5" name="Picture 4">
+            <a:extLst>
+              <a:ext uri="{FF2B5EF4-FFF2-40B4-BE49-F238E27FC236}">
+                <a16:creationId xmlns:a16="http://schemas.microsoft.com/office/drawing/2014/main" id="{6B17FF7D-DA1D-A909-AD67-8641E3571687}"/>
               </a:ext>
             </a:extLst>
           </p:cNvPr>
@@ -7700,8 +7713,8 @@
         </p:blipFill>
         <p:spPr>
           <a:xfrm>
-            <a:off x="6221880" y="685614"/>
-            <a:ext cx="4572009" cy="5486411"/>
+            <a:off x="862050" y="2377440"/>
+            <a:ext cx="4740630" cy="2370315"/>
           </a:xfrm>
           <a:prstGeom prst="rect">
             <a:avLst/>
@@ -7719,6 +7732,14 @@
 <file path=ppt/slides/slide2.xml><?xml version="1.0" encoding="utf-8"?>
 <p:sld xmlns:a="http://schemas.openxmlformats.org/drawingml/2006/main" xmlns:r="http://schemas.openxmlformats.org/officeDocument/2006/relationships" xmlns:p="http://schemas.openxmlformats.org/presentationml/2006/main">
   <p:cSld>
+    <p:bg>
+      <p:bgPr>
+        <a:solidFill>
+          <a:schemeClr val="bg1"/>
+        </a:solidFill>
+        <a:effectLst/>
+      </p:bgPr>
+    </p:bg>
     <p:spTree>
       <p:nvGrpSpPr>
         <p:cNvPr id="1" name=""/>
@@ -7733,6 +7754,223 @@
           <a:chExt cx="0" cy="0"/>
         </a:xfrm>
       </p:grpSpPr>
+      <p:sp>
+        <p:nvSpPr>
+          <p:cNvPr id="99" name="Rectangle 98">
+            <a:extLst>
+              <a:ext uri="{FF2B5EF4-FFF2-40B4-BE49-F238E27FC236}">
+                <a16:creationId xmlns:a16="http://schemas.microsoft.com/office/drawing/2014/main" id="{664E23E2-7440-4E36-A67B-0F88C5F7E185}"/>
+              </a:ext>
+              <a:ext uri="{C183D7F6-B498-43B3-948B-1728B52AA6E4}">
+                <adec:decorative xmlns:adec="http://schemas.microsoft.com/office/drawing/2017/decorative" val="1"/>
+              </a:ext>
+            </a:extLst>
+          </p:cNvPr>
+          <p:cNvSpPr>
+            <a:spLocks noGrp="1" noRot="1" noChangeAspect="1" noMove="1" noResize="1" noEditPoints="1" noAdjustHandles="1" noChangeArrowheads="1" noChangeShapeType="1" noTextEdit="1"/>
+          </p:cNvSpPr>
+          <p:nvPr>
+            <p:extLst>
+              <p:ext uri="{386F3935-93C4-4BCD-93E2-E3B085C9AB24}">
+                <p16:designElem xmlns:p16="http://schemas.microsoft.com/office/powerpoint/2015/main" val="1"/>
+              </p:ext>
+            </p:extLst>
+          </p:nvPr>
+        </p:nvSpPr>
+        <p:spPr>
+          <a:xfrm>
+            <a:off x="0" y="0"/>
+            <a:ext cx="12192000" cy="6858000"/>
+          </a:xfrm>
+          <a:prstGeom prst="rect">
+            <a:avLst/>
+          </a:prstGeom>
+          <a:solidFill>
+            <a:schemeClr val="tx1">
+              <a:lumMod val="50000"/>
+              <a:lumOff val="50000"/>
+              <a:alpha val="30000"/>
+            </a:schemeClr>
+          </a:solidFill>
+          <a:ln>
+            <a:noFill/>
+          </a:ln>
+        </p:spPr>
+        <p:style>
+          <a:lnRef idx="2">
+            <a:schemeClr val="accent1">
+              <a:shade val="50000"/>
+            </a:schemeClr>
+          </a:lnRef>
+          <a:fillRef idx="1">
+            <a:schemeClr val="accent1"/>
+          </a:fillRef>
+          <a:effectRef idx="0">
+            <a:schemeClr val="accent1"/>
+          </a:effectRef>
+          <a:fontRef idx="minor">
+            <a:schemeClr val="lt1"/>
+          </a:fontRef>
+        </p:style>
+        <p:txBody>
+          <a:bodyPr rtlCol="0" anchor="ctr"/>
+          <a:lstStyle/>
+          <a:p>
+            <a:pPr algn="ctr"/>
+            <a:endParaRPr lang="en-US"/>
+          </a:p>
+        </p:txBody>
+      </p:sp>
+      <p:sp>
+        <p:nvSpPr>
+          <p:cNvPr id="100" name="Rectangle 99">
+            <a:extLst>
+              <a:ext uri="{FF2B5EF4-FFF2-40B4-BE49-F238E27FC236}">
+                <a16:creationId xmlns:a16="http://schemas.microsoft.com/office/drawing/2014/main" id="{B06949AE-010D-4C18-8AED-7872085ADD57}"/>
+              </a:ext>
+              <a:ext uri="{C183D7F6-B498-43B3-948B-1728B52AA6E4}">
+                <adec:decorative xmlns:adec="http://schemas.microsoft.com/office/drawing/2017/decorative" val="1"/>
+              </a:ext>
+            </a:extLst>
+          </p:cNvPr>
+          <p:cNvSpPr>
+            <a:spLocks noGrp="1" noRot="1" noChangeAspect="1" noMove="1" noResize="1" noEditPoints="1" noAdjustHandles="1" noChangeArrowheads="1" noChangeShapeType="1" noTextEdit="1"/>
+          </p:cNvSpPr>
+          <p:nvPr>
+            <p:extLst>
+              <p:ext uri="{386F3935-93C4-4BCD-93E2-E3B085C9AB24}">
+                <p16:designElem xmlns:p16="http://schemas.microsoft.com/office/powerpoint/2015/main" val="1"/>
+              </p:ext>
+            </p:extLst>
+          </p:nvPr>
+        </p:nvSpPr>
+        <p:spPr>
+          <a:xfrm>
+            <a:off x="477012" y="487090"/>
+            <a:ext cx="5458121" cy="5897880"/>
+          </a:xfrm>
+          <a:prstGeom prst="rect">
+            <a:avLst/>
+          </a:prstGeom>
+          <a:solidFill>
+            <a:srgbClr val="FFFFFF"/>
+          </a:solidFill>
+          <a:ln w="19050">
+            <a:solidFill>
+              <a:srgbClr val="549A54"/>
+            </a:solidFill>
+          </a:ln>
+        </p:spPr>
+        <p:style>
+          <a:lnRef idx="2">
+            <a:schemeClr val="accent1">
+              <a:shade val="50000"/>
+            </a:schemeClr>
+          </a:lnRef>
+          <a:fillRef idx="1">
+            <a:schemeClr val="accent1"/>
+          </a:fillRef>
+          <a:effectRef idx="0">
+            <a:schemeClr val="accent1"/>
+          </a:effectRef>
+          <a:fontRef idx="minor">
+            <a:schemeClr val="lt1"/>
+          </a:fontRef>
+        </p:style>
+        <p:txBody>
+          <a:bodyPr rtlCol="0" anchor="ctr"/>
+          <a:lstStyle/>
+          <a:p>
+            <a:pPr algn="ctr"/>
+            <a:endParaRPr lang="en-US"/>
+          </a:p>
+        </p:txBody>
+      </p:sp>
+      <p:pic>
+        <p:nvPicPr>
+          <p:cNvPr id="88" name="Picture 6"/>
+          <p:cNvPicPr/>
+          <p:nvPr/>
+        </p:nvPicPr>
+        <p:blipFill>
+          <a:blip r:embed="rId2"/>
+          <a:stretch/>
+        </p:blipFill>
+        <p:spPr>
+          <a:xfrm>
+            <a:off x="641180" y="871138"/>
+            <a:ext cx="5129784" cy="5129784"/>
+          </a:xfrm>
+          <a:prstGeom prst="rect">
+            <a:avLst/>
+          </a:prstGeom>
+        </p:spPr>
+      </p:pic>
+      <p:sp>
+        <p:nvSpPr>
+          <p:cNvPr id="101" name="Rectangle 100">
+            <a:extLst>
+              <a:ext uri="{FF2B5EF4-FFF2-40B4-BE49-F238E27FC236}">
+                <a16:creationId xmlns:a16="http://schemas.microsoft.com/office/drawing/2014/main" id="{FE54AADB-50C7-4293-94C0-27361A32B8CF}"/>
+              </a:ext>
+              <a:ext uri="{C183D7F6-B498-43B3-948B-1728B52AA6E4}">
+                <adec:decorative xmlns:adec="http://schemas.microsoft.com/office/drawing/2017/decorative" val="1"/>
+              </a:ext>
+            </a:extLst>
+          </p:cNvPr>
+          <p:cNvSpPr>
+            <a:spLocks noGrp="1" noRot="1" noChangeAspect="1" noMove="1" noResize="1" noEditPoints="1" noAdjustHandles="1" noChangeArrowheads="1" noChangeShapeType="1" noTextEdit="1"/>
+          </p:cNvSpPr>
+          <p:nvPr>
+            <p:extLst>
+              <p:ext uri="{386F3935-93C4-4BCD-93E2-E3B085C9AB24}">
+                <p16:designElem xmlns:p16="http://schemas.microsoft.com/office/powerpoint/2015/main" val="1"/>
+              </p:ext>
+            </p:extLst>
+          </p:nvPr>
+        </p:nvSpPr>
+        <p:spPr>
+          <a:xfrm>
+            <a:off x="6256866" y="480060"/>
+            <a:ext cx="5458121" cy="5897880"/>
+          </a:xfrm>
+          <a:prstGeom prst="rect">
+            <a:avLst/>
+          </a:prstGeom>
+          <a:solidFill>
+            <a:srgbClr val="FFFFFF"/>
+          </a:solidFill>
+          <a:ln w="19050">
+            <a:solidFill>
+              <a:srgbClr val="549A54"/>
+            </a:solidFill>
+          </a:ln>
+        </p:spPr>
+        <p:style>
+          <a:lnRef idx="2">
+            <a:schemeClr val="accent1">
+              <a:shade val="50000"/>
+            </a:schemeClr>
+          </a:lnRef>
+          <a:fillRef idx="1">
+            <a:schemeClr val="accent1"/>
+          </a:fillRef>
+          <a:effectRef idx="0">
+            <a:schemeClr val="accent1"/>
+          </a:effectRef>
+          <a:fontRef idx="minor">
+            <a:schemeClr val="lt1"/>
+          </a:fontRef>
+        </p:style>
+        <p:txBody>
+          <a:bodyPr rtlCol="0" anchor="ctr"/>
+          <a:lstStyle/>
+          <a:p>
+            <a:pPr algn="ctr"/>
+            <a:endParaRPr lang="en-US"/>
+          </a:p>
+        </p:txBody>
+      </p:sp>
       <p:pic>
         <p:nvPicPr>
           <p:cNvPr id="87" name="Picture 4"/>
@@ -7740,43 +7978,17 @@
           <p:nvPr/>
         </p:nvPicPr>
         <p:blipFill>
-          <a:blip r:embed="rId2"/>
-          <a:stretch/>
-        </p:blipFill>
-        <p:spPr>
-          <a:xfrm>
-            <a:off x="70560" y="685800"/>
-            <a:ext cx="5486040" cy="5486040"/>
-          </a:xfrm>
-          <a:prstGeom prst="rect">
-            <a:avLst/>
-          </a:prstGeom>
-          <a:ln w="0">
-            <a:noFill/>
-          </a:ln>
-        </p:spPr>
-      </p:pic>
-      <p:pic>
-        <p:nvPicPr>
-          <p:cNvPr id="88" name="Picture 6"/>
-          <p:cNvPicPr/>
-          <p:nvPr/>
-        </p:nvPicPr>
-        <p:blipFill>
           <a:blip r:embed="rId3"/>
           <a:stretch/>
         </p:blipFill>
         <p:spPr>
           <a:xfrm>
-            <a:off x="5778360" y="685800"/>
-            <a:ext cx="5486040" cy="5486040"/>
-          </a:xfrm>
-          <a:prstGeom prst="rect">
-            <a:avLst/>
-          </a:prstGeom>
-          <a:ln w="0">
-            <a:noFill/>
-          </a:ln>
+            <a:off x="6421034" y="864108"/>
+            <a:ext cx="5129784" cy="5129784"/>
+          </a:xfrm>
+          <a:prstGeom prst="rect">
+            <a:avLst/>
+          </a:prstGeom>
         </p:spPr>
       </p:pic>
     </p:spTree>
@@ -7790,6 +8002,14 @@
 <file path=ppt/slides/slide3.xml><?xml version="1.0" encoding="utf-8"?>
 <p:sld xmlns:a="http://schemas.openxmlformats.org/drawingml/2006/main" xmlns:r="http://schemas.openxmlformats.org/officeDocument/2006/relationships" xmlns:p="http://schemas.openxmlformats.org/presentationml/2006/main">
   <p:cSld>
+    <p:bg>
+      <p:bgPr>
+        <a:solidFill>
+          <a:schemeClr val="bg1"/>
+        </a:solidFill>
+        <a:effectLst/>
+      </p:bgPr>
+    </p:bg>
     <p:spTree>
       <p:nvGrpSpPr>
         <p:cNvPr id="1" name=""/>
@@ -7804,6 +8024,223 @@
           <a:chExt cx="0" cy="0"/>
         </a:xfrm>
       </p:grpSpPr>
+      <p:sp>
+        <p:nvSpPr>
+          <p:cNvPr id="95" name="Rectangle 94">
+            <a:extLst>
+              <a:ext uri="{FF2B5EF4-FFF2-40B4-BE49-F238E27FC236}">
+                <a16:creationId xmlns:a16="http://schemas.microsoft.com/office/drawing/2014/main" id="{664E23E2-7440-4E36-A67B-0F88C5F7E185}"/>
+              </a:ext>
+              <a:ext uri="{C183D7F6-B498-43B3-948B-1728B52AA6E4}">
+                <adec:decorative xmlns:adec="http://schemas.microsoft.com/office/drawing/2017/decorative" val="1"/>
+              </a:ext>
+            </a:extLst>
+          </p:cNvPr>
+          <p:cNvSpPr>
+            <a:spLocks noGrp="1" noRot="1" noChangeAspect="1" noMove="1" noResize="1" noEditPoints="1" noAdjustHandles="1" noChangeArrowheads="1" noChangeShapeType="1" noTextEdit="1"/>
+          </p:cNvSpPr>
+          <p:nvPr>
+            <p:extLst>
+              <p:ext uri="{386F3935-93C4-4BCD-93E2-E3B085C9AB24}">
+                <p16:designElem xmlns:p16="http://schemas.microsoft.com/office/powerpoint/2015/main" val="1"/>
+              </p:ext>
+            </p:extLst>
+          </p:nvPr>
+        </p:nvSpPr>
+        <p:spPr>
+          <a:xfrm>
+            <a:off x="0" y="0"/>
+            <a:ext cx="12192000" cy="6858000"/>
+          </a:xfrm>
+          <a:prstGeom prst="rect">
+            <a:avLst/>
+          </a:prstGeom>
+          <a:solidFill>
+            <a:schemeClr val="tx1">
+              <a:lumMod val="50000"/>
+              <a:lumOff val="50000"/>
+              <a:alpha val="30000"/>
+            </a:schemeClr>
+          </a:solidFill>
+          <a:ln>
+            <a:noFill/>
+          </a:ln>
+        </p:spPr>
+        <p:style>
+          <a:lnRef idx="2">
+            <a:schemeClr val="accent1">
+              <a:shade val="50000"/>
+            </a:schemeClr>
+          </a:lnRef>
+          <a:fillRef idx="1">
+            <a:schemeClr val="accent1"/>
+          </a:fillRef>
+          <a:effectRef idx="0">
+            <a:schemeClr val="accent1"/>
+          </a:effectRef>
+          <a:fontRef idx="minor">
+            <a:schemeClr val="lt1"/>
+          </a:fontRef>
+        </p:style>
+        <p:txBody>
+          <a:bodyPr rtlCol="0" anchor="ctr"/>
+          <a:lstStyle/>
+          <a:p>
+            <a:pPr algn="ctr"/>
+            <a:endParaRPr lang="en-US"/>
+          </a:p>
+        </p:txBody>
+      </p:sp>
+      <p:sp>
+        <p:nvSpPr>
+          <p:cNvPr id="97" name="Rectangle 96">
+            <a:extLst>
+              <a:ext uri="{FF2B5EF4-FFF2-40B4-BE49-F238E27FC236}">
+                <a16:creationId xmlns:a16="http://schemas.microsoft.com/office/drawing/2014/main" id="{B06949AE-010D-4C18-8AED-7872085ADD57}"/>
+              </a:ext>
+              <a:ext uri="{C183D7F6-B498-43B3-948B-1728B52AA6E4}">
+                <adec:decorative xmlns:adec="http://schemas.microsoft.com/office/drawing/2017/decorative" val="1"/>
+              </a:ext>
+            </a:extLst>
+          </p:cNvPr>
+          <p:cNvSpPr>
+            <a:spLocks noGrp="1" noRot="1" noChangeAspect="1" noMove="1" noResize="1" noEditPoints="1" noAdjustHandles="1" noChangeArrowheads="1" noChangeShapeType="1" noTextEdit="1"/>
+          </p:cNvSpPr>
+          <p:nvPr>
+            <p:extLst>
+              <p:ext uri="{386F3935-93C4-4BCD-93E2-E3B085C9AB24}">
+                <p16:designElem xmlns:p16="http://schemas.microsoft.com/office/powerpoint/2015/main" val="1"/>
+              </p:ext>
+            </p:extLst>
+          </p:nvPr>
+        </p:nvSpPr>
+        <p:spPr>
+          <a:xfrm>
+            <a:off x="477012" y="487090"/>
+            <a:ext cx="5458121" cy="5897880"/>
+          </a:xfrm>
+          <a:prstGeom prst="rect">
+            <a:avLst/>
+          </a:prstGeom>
+          <a:solidFill>
+            <a:srgbClr val="FFFFFF"/>
+          </a:solidFill>
+          <a:ln w="19050">
+            <a:solidFill>
+              <a:srgbClr val="3D9F3D"/>
+            </a:solidFill>
+          </a:ln>
+        </p:spPr>
+        <p:style>
+          <a:lnRef idx="2">
+            <a:schemeClr val="accent1">
+              <a:shade val="50000"/>
+            </a:schemeClr>
+          </a:lnRef>
+          <a:fillRef idx="1">
+            <a:schemeClr val="accent1"/>
+          </a:fillRef>
+          <a:effectRef idx="0">
+            <a:schemeClr val="accent1"/>
+          </a:effectRef>
+          <a:fontRef idx="minor">
+            <a:schemeClr val="lt1"/>
+          </a:fontRef>
+        </p:style>
+        <p:txBody>
+          <a:bodyPr rtlCol="0" anchor="ctr"/>
+          <a:lstStyle/>
+          <a:p>
+            <a:pPr algn="ctr"/>
+            <a:endParaRPr lang="en-US"/>
+          </a:p>
+        </p:txBody>
+      </p:sp>
+      <p:pic>
+        <p:nvPicPr>
+          <p:cNvPr id="90" name="Picture 4"/>
+          <p:cNvPicPr/>
+          <p:nvPr/>
+        </p:nvPicPr>
+        <p:blipFill>
+          <a:blip r:embed="rId2"/>
+          <a:stretch/>
+        </p:blipFill>
+        <p:spPr>
+          <a:xfrm>
+            <a:off x="641180" y="871138"/>
+            <a:ext cx="5129784" cy="5129784"/>
+          </a:xfrm>
+          <a:prstGeom prst="rect">
+            <a:avLst/>
+          </a:prstGeom>
+        </p:spPr>
+      </p:pic>
+      <p:sp>
+        <p:nvSpPr>
+          <p:cNvPr id="99" name="Rectangle 98">
+            <a:extLst>
+              <a:ext uri="{FF2B5EF4-FFF2-40B4-BE49-F238E27FC236}">
+                <a16:creationId xmlns:a16="http://schemas.microsoft.com/office/drawing/2014/main" id="{FE54AADB-50C7-4293-94C0-27361A32B8CF}"/>
+              </a:ext>
+              <a:ext uri="{C183D7F6-B498-43B3-948B-1728B52AA6E4}">
+                <adec:decorative xmlns:adec="http://schemas.microsoft.com/office/drawing/2017/decorative" val="1"/>
+              </a:ext>
+            </a:extLst>
+          </p:cNvPr>
+          <p:cNvSpPr>
+            <a:spLocks noGrp="1" noRot="1" noChangeAspect="1" noMove="1" noResize="1" noEditPoints="1" noAdjustHandles="1" noChangeArrowheads="1" noChangeShapeType="1" noTextEdit="1"/>
+          </p:cNvSpPr>
+          <p:nvPr>
+            <p:extLst>
+              <p:ext uri="{386F3935-93C4-4BCD-93E2-E3B085C9AB24}">
+                <p16:designElem xmlns:p16="http://schemas.microsoft.com/office/powerpoint/2015/main" val="1"/>
+              </p:ext>
+            </p:extLst>
+          </p:nvPr>
+        </p:nvSpPr>
+        <p:spPr>
+          <a:xfrm>
+            <a:off x="6256866" y="480060"/>
+            <a:ext cx="5458121" cy="5897880"/>
+          </a:xfrm>
+          <a:prstGeom prst="rect">
+            <a:avLst/>
+          </a:prstGeom>
+          <a:solidFill>
+            <a:srgbClr val="FFFFFF"/>
+          </a:solidFill>
+          <a:ln w="19050">
+            <a:solidFill>
+              <a:srgbClr val="3D9F3D"/>
+            </a:solidFill>
+          </a:ln>
+        </p:spPr>
+        <p:style>
+          <a:lnRef idx="2">
+            <a:schemeClr val="accent1">
+              <a:shade val="50000"/>
+            </a:schemeClr>
+          </a:lnRef>
+          <a:fillRef idx="1">
+            <a:schemeClr val="accent1"/>
+          </a:fillRef>
+          <a:effectRef idx="0">
+            <a:schemeClr val="accent1"/>
+          </a:effectRef>
+          <a:fontRef idx="minor">
+            <a:schemeClr val="lt1"/>
+          </a:fontRef>
+        </p:style>
+        <p:txBody>
+          <a:bodyPr rtlCol="0" anchor="ctr"/>
+          <a:lstStyle/>
+          <a:p>
+            <a:pPr algn="ctr"/>
+            <a:endParaRPr lang="en-US"/>
+          </a:p>
+        </p:txBody>
+      </p:sp>
       <p:pic>
         <p:nvPicPr>
           <p:cNvPr id="89" name="Picture 2"/>
@@ -7811,43 +8248,17 @@
           <p:nvPr/>
         </p:nvPicPr>
         <p:blipFill>
-          <a:blip r:embed="rId2"/>
-          <a:stretch/>
-        </p:blipFill>
-        <p:spPr>
-          <a:xfrm>
-            <a:off x="282240" y="579960"/>
-            <a:ext cx="5486040" cy="5486040"/>
-          </a:xfrm>
-          <a:prstGeom prst="rect">
-            <a:avLst/>
-          </a:prstGeom>
-          <a:ln w="0">
-            <a:noFill/>
-          </a:ln>
-        </p:spPr>
-      </p:pic>
-      <p:pic>
-        <p:nvPicPr>
-          <p:cNvPr id="90" name="Picture 4"/>
-          <p:cNvPicPr/>
-          <p:nvPr/>
-        </p:nvPicPr>
-        <p:blipFill>
           <a:blip r:embed="rId3"/>
           <a:stretch/>
         </p:blipFill>
         <p:spPr>
           <a:xfrm>
-            <a:off x="5970960" y="579960"/>
-            <a:ext cx="5486040" cy="5486040"/>
-          </a:xfrm>
-          <a:prstGeom prst="rect">
-            <a:avLst/>
-          </a:prstGeom>
-          <a:ln w="0">
-            <a:noFill/>
-          </a:ln>
+            <a:off x="6421034" y="864108"/>
+            <a:ext cx="5129784" cy="5129784"/>
+          </a:xfrm>
+          <a:prstGeom prst="rect">
+            <a:avLst/>
+          </a:prstGeom>
         </p:spPr>
       </p:pic>
     </p:spTree>
@@ -7861,6 +8272,14 @@
 <file path=ppt/slides/slide4.xml><?xml version="1.0" encoding="utf-8"?>
 <p:sld xmlns:a="http://schemas.openxmlformats.org/drawingml/2006/main" xmlns:r="http://schemas.openxmlformats.org/officeDocument/2006/relationships" xmlns:p="http://schemas.openxmlformats.org/presentationml/2006/main">
   <p:cSld>
+    <p:bg>
+      <p:bgPr>
+        <a:solidFill>
+          <a:schemeClr val="bg1"/>
+        </a:solidFill>
+        <a:effectLst/>
+      </p:bgPr>
+    </p:bg>
     <p:spTree>
       <p:nvGrpSpPr>
         <p:cNvPr id="1" name=""/>
@@ -7875,6 +8294,138 @@
           <a:chExt cx="0" cy="0"/>
         </a:xfrm>
       </p:grpSpPr>
+      <p:sp>
+        <p:nvSpPr>
+          <p:cNvPr id="108" name="Rectangle 107">
+            <a:extLst>
+              <a:ext uri="{FF2B5EF4-FFF2-40B4-BE49-F238E27FC236}">
+                <a16:creationId xmlns:a16="http://schemas.microsoft.com/office/drawing/2014/main" id="{664E23E2-7440-4E36-A67B-0F88C5F7E185}"/>
+              </a:ext>
+              <a:ext uri="{C183D7F6-B498-43B3-948B-1728B52AA6E4}">
+                <adec:decorative xmlns:adec="http://schemas.microsoft.com/office/drawing/2017/decorative" val="1"/>
+              </a:ext>
+            </a:extLst>
+          </p:cNvPr>
+          <p:cNvSpPr>
+            <a:spLocks noGrp="1" noRot="1" noChangeAspect="1" noMove="1" noResize="1" noEditPoints="1" noAdjustHandles="1" noChangeArrowheads="1" noChangeShapeType="1" noTextEdit="1"/>
+          </p:cNvSpPr>
+          <p:nvPr>
+            <p:extLst>
+              <p:ext uri="{386F3935-93C4-4BCD-93E2-E3B085C9AB24}">
+                <p16:designElem xmlns:p16="http://schemas.microsoft.com/office/powerpoint/2015/main" val="1"/>
+              </p:ext>
+            </p:extLst>
+          </p:nvPr>
+        </p:nvSpPr>
+        <p:spPr>
+          <a:xfrm>
+            <a:off x="0" y="0"/>
+            <a:ext cx="12192000" cy="6858000"/>
+          </a:xfrm>
+          <a:prstGeom prst="rect">
+            <a:avLst/>
+          </a:prstGeom>
+          <a:solidFill>
+            <a:schemeClr val="tx1">
+              <a:lumMod val="50000"/>
+              <a:lumOff val="50000"/>
+              <a:alpha val="30000"/>
+            </a:schemeClr>
+          </a:solidFill>
+          <a:ln>
+            <a:noFill/>
+          </a:ln>
+        </p:spPr>
+        <p:style>
+          <a:lnRef idx="2">
+            <a:schemeClr val="accent1">
+              <a:shade val="50000"/>
+            </a:schemeClr>
+          </a:lnRef>
+          <a:fillRef idx="1">
+            <a:schemeClr val="accent1"/>
+          </a:fillRef>
+          <a:effectRef idx="0">
+            <a:schemeClr val="accent1"/>
+          </a:effectRef>
+          <a:fontRef idx="minor">
+            <a:schemeClr val="lt1"/>
+          </a:fontRef>
+        </p:style>
+        <p:txBody>
+          <a:bodyPr rtlCol="0" anchor="ctr"/>
+          <a:lstStyle/>
+          <a:p>
+            <a:pPr algn="ctr"/>
+            <a:endParaRPr lang="en-US"/>
+          </a:p>
+        </p:txBody>
+      </p:sp>
+      <p:sp>
+        <p:nvSpPr>
+          <p:cNvPr id="110" name="Rectangle 109">
+            <a:extLst>
+              <a:ext uri="{FF2B5EF4-FFF2-40B4-BE49-F238E27FC236}">
+                <a16:creationId xmlns:a16="http://schemas.microsoft.com/office/drawing/2014/main" id="{B06949AE-010D-4C18-8AED-7872085ADD57}"/>
+              </a:ext>
+              <a:ext uri="{C183D7F6-B498-43B3-948B-1728B52AA6E4}">
+                <adec:decorative xmlns:adec="http://schemas.microsoft.com/office/drawing/2017/decorative" val="1"/>
+              </a:ext>
+            </a:extLst>
+          </p:cNvPr>
+          <p:cNvSpPr>
+            <a:spLocks noGrp="1" noRot="1" noChangeAspect="1" noMove="1" noResize="1" noEditPoints="1" noAdjustHandles="1" noChangeArrowheads="1" noChangeShapeType="1" noTextEdit="1"/>
+          </p:cNvSpPr>
+          <p:nvPr>
+            <p:extLst>
+              <p:ext uri="{386F3935-93C4-4BCD-93E2-E3B085C9AB24}">
+                <p16:designElem xmlns:p16="http://schemas.microsoft.com/office/powerpoint/2015/main" val="1"/>
+              </p:ext>
+            </p:extLst>
+          </p:nvPr>
+        </p:nvSpPr>
+        <p:spPr>
+          <a:xfrm>
+            <a:off x="477012" y="487090"/>
+            <a:ext cx="5458121" cy="5897880"/>
+          </a:xfrm>
+          <a:prstGeom prst="rect">
+            <a:avLst/>
+          </a:prstGeom>
+          <a:solidFill>
+            <a:srgbClr val="FFFFFF"/>
+          </a:solidFill>
+          <a:ln w="19050">
+            <a:solidFill>
+              <a:srgbClr val="F8613D"/>
+            </a:solidFill>
+          </a:ln>
+        </p:spPr>
+        <p:style>
+          <a:lnRef idx="2">
+            <a:schemeClr val="accent1">
+              <a:shade val="50000"/>
+            </a:schemeClr>
+          </a:lnRef>
+          <a:fillRef idx="1">
+            <a:schemeClr val="accent1"/>
+          </a:fillRef>
+          <a:effectRef idx="0">
+            <a:schemeClr val="accent1"/>
+          </a:effectRef>
+          <a:fontRef idx="minor">
+            <a:schemeClr val="lt1"/>
+          </a:fontRef>
+        </p:style>
+        <p:txBody>
+          <a:bodyPr rtlCol="0" anchor="ctr"/>
+          <a:lstStyle/>
+          <a:p>
+            <a:pPr algn="ctr"/>
+            <a:endParaRPr lang="en-US"/>
+          </a:p>
+        </p:txBody>
+      </p:sp>
       <p:pic>
         <p:nvPicPr>
           <p:cNvPr id="94" name="Picture 2"/>
@@ -7887,15 +8438,113 @@
         </p:blipFill>
         <p:spPr>
           <a:xfrm>
-            <a:off x="299160" y="654480"/>
-            <a:ext cx="5173200" cy="5173200"/>
-          </a:xfrm>
-          <a:prstGeom prst="rect">
-            <a:avLst/>
-          </a:prstGeom>
-          <a:ln w="0">
-            <a:noFill/>
-          </a:ln>
+            <a:off x="641180" y="871138"/>
+            <a:ext cx="5129784" cy="5129784"/>
+          </a:xfrm>
+          <a:prstGeom prst="rect">
+            <a:avLst/>
+          </a:prstGeom>
+        </p:spPr>
+      </p:pic>
+      <p:sp>
+        <p:nvSpPr>
+          <p:cNvPr id="112" name="Rectangle 111">
+            <a:extLst>
+              <a:ext uri="{FF2B5EF4-FFF2-40B4-BE49-F238E27FC236}">
+                <a16:creationId xmlns:a16="http://schemas.microsoft.com/office/drawing/2014/main" id="{FE54AADB-50C7-4293-94C0-27361A32B8CF}"/>
+              </a:ext>
+              <a:ext uri="{C183D7F6-B498-43B3-948B-1728B52AA6E4}">
+                <adec:decorative xmlns:adec="http://schemas.microsoft.com/office/drawing/2017/decorative" val="1"/>
+              </a:ext>
+            </a:extLst>
+          </p:cNvPr>
+          <p:cNvSpPr>
+            <a:spLocks noGrp="1" noRot="1" noChangeAspect="1" noMove="1" noResize="1" noEditPoints="1" noAdjustHandles="1" noChangeArrowheads="1" noChangeShapeType="1" noTextEdit="1"/>
+          </p:cNvSpPr>
+          <p:nvPr>
+            <p:extLst>
+              <p:ext uri="{386F3935-93C4-4BCD-93E2-E3B085C9AB24}">
+                <p16:designElem xmlns:p16="http://schemas.microsoft.com/office/powerpoint/2015/main" val="1"/>
+              </p:ext>
+            </p:extLst>
+          </p:nvPr>
+        </p:nvSpPr>
+        <p:spPr>
+          <a:xfrm>
+            <a:off x="6256866" y="480060"/>
+            <a:ext cx="5458121" cy="5897880"/>
+          </a:xfrm>
+          <a:prstGeom prst="rect">
+            <a:avLst/>
+          </a:prstGeom>
+          <a:solidFill>
+            <a:srgbClr val="FFFFFF"/>
+          </a:solidFill>
+          <a:ln w="19050">
+            <a:solidFill>
+              <a:srgbClr val="F8613D"/>
+            </a:solidFill>
+          </a:ln>
+        </p:spPr>
+        <p:style>
+          <a:lnRef idx="2">
+            <a:schemeClr val="accent1">
+              <a:shade val="50000"/>
+            </a:schemeClr>
+          </a:lnRef>
+          <a:fillRef idx="1">
+            <a:schemeClr val="accent1"/>
+          </a:fillRef>
+          <a:effectRef idx="0">
+            <a:schemeClr val="accent1"/>
+          </a:effectRef>
+          <a:fontRef idx="minor">
+            <a:schemeClr val="lt1"/>
+          </a:fontRef>
+        </p:style>
+        <p:txBody>
+          <a:bodyPr rtlCol="0" anchor="ctr"/>
+          <a:lstStyle/>
+          <a:p>
+            <a:pPr algn="ctr"/>
+            <a:endParaRPr lang="en-US"/>
+          </a:p>
+        </p:txBody>
+      </p:sp>
+      <p:pic>
+        <p:nvPicPr>
+          <p:cNvPr id="5" name="Picture 4">
+            <a:extLst>
+              <a:ext uri="{FF2B5EF4-FFF2-40B4-BE49-F238E27FC236}">
+                <a16:creationId xmlns:a16="http://schemas.microsoft.com/office/drawing/2014/main" id="{3EF6D908-8BB0-E734-A80B-BA7458954D58}"/>
+              </a:ext>
+            </a:extLst>
+          </p:cNvPr>
+          <p:cNvPicPr>
+            <a:picLocks noChangeAspect="1"/>
+          </p:cNvPicPr>
+          <p:nvPr/>
+        </p:nvPicPr>
+        <p:blipFill>
+          <a:blip r:embed="rId3" cstate="print">
+            <a:extLst>
+              <a:ext uri="{28A0092B-C50C-407E-A947-70E740481C1C}">
+                <a14:useLocalDpi xmlns:a14="http://schemas.microsoft.com/office/drawing/2010/main" val="0"/>
+              </a:ext>
+            </a:extLst>
+          </a:blip>
+          <a:stretch>
+            <a:fillRect/>
+          </a:stretch>
+        </p:blipFill>
+        <p:spPr>
+          <a:xfrm>
+            <a:off x="6421034" y="864108"/>
+            <a:ext cx="5129784" cy="5129784"/>
+          </a:xfrm>
+          <a:prstGeom prst="rect">
+            <a:avLst/>
+          </a:prstGeom>
         </p:spPr>
       </p:pic>
     </p:spTree>
@@ -7957,6 +8606,14 @@
 <file path=ppt/slides/slide6.xml><?xml version="1.0" encoding="utf-8"?>
 <p:sld xmlns:a="http://schemas.openxmlformats.org/drawingml/2006/main" xmlns:r="http://schemas.openxmlformats.org/officeDocument/2006/relationships" xmlns:p="http://schemas.openxmlformats.org/presentationml/2006/main">
   <p:cSld>
+    <p:bg>
+      <p:bgPr>
+        <a:solidFill>
+          <a:schemeClr val="bg1"/>
+        </a:solidFill>
+        <a:effectLst/>
+      </p:bgPr>
+    </p:bg>
     <p:spTree>
       <p:nvGrpSpPr>
         <p:cNvPr id="1" name=""/>
@@ -7971,6 +8628,138 @@
           <a:chExt cx="0" cy="0"/>
         </a:xfrm>
       </p:grpSpPr>
+      <p:sp>
+        <p:nvSpPr>
+          <p:cNvPr id="98" name="Rectangle 97">
+            <a:extLst>
+              <a:ext uri="{FF2B5EF4-FFF2-40B4-BE49-F238E27FC236}">
+                <a16:creationId xmlns:a16="http://schemas.microsoft.com/office/drawing/2014/main" id="{664E23E2-7440-4E36-A67B-0F88C5F7E185}"/>
+              </a:ext>
+              <a:ext uri="{C183D7F6-B498-43B3-948B-1728B52AA6E4}">
+                <adec:decorative xmlns:adec="http://schemas.microsoft.com/office/drawing/2017/decorative" val="1"/>
+              </a:ext>
+            </a:extLst>
+          </p:cNvPr>
+          <p:cNvSpPr>
+            <a:spLocks noGrp="1" noRot="1" noChangeAspect="1" noMove="1" noResize="1" noEditPoints="1" noAdjustHandles="1" noChangeArrowheads="1" noChangeShapeType="1" noTextEdit="1"/>
+          </p:cNvSpPr>
+          <p:nvPr>
+            <p:extLst>
+              <p:ext uri="{386F3935-93C4-4BCD-93E2-E3B085C9AB24}">
+                <p16:designElem xmlns:p16="http://schemas.microsoft.com/office/powerpoint/2015/main" val="1"/>
+              </p:ext>
+            </p:extLst>
+          </p:nvPr>
+        </p:nvSpPr>
+        <p:spPr>
+          <a:xfrm>
+            <a:off x="0" y="0"/>
+            <a:ext cx="12192000" cy="6858000"/>
+          </a:xfrm>
+          <a:prstGeom prst="rect">
+            <a:avLst/>
+          </a:prstGeom>
+          <a:solidFill>
+            <a:schemeClr val="tx1">
+              <a:lumMod val="50000"/>
+              <a:lumOff val="50000"/>
+              <a:alpha val="30000"/>
+            </a:schemeClr>
+          </a:solidFill>
+          <a:ln>
+            <a:noFill/>
+          </a:ln>
+        </p:spPr>
+        <p:style>
+          <a:lnRef idx="2">
+            <a:schemeClr val="accent1">
+              <a:shade val="50000"/>
+            </a:schemeClr>
+          </a:lnRef>
+          <a:fillRef idx="1">
+            <a:schemeClr val="accent1"/>
+          </a:fillRef>
+          <a:effectRef idx="0">
+            <a:schemeClr val="accent1"/>
+          </a:effectRef>
+          <a:fontRef idx="minor">
+            <a:schemeClr val="lt1"/>
+          </a:fontRef>
+        </p:style>
+        <p:txBody>
+          <a:bodyPr rtlCol="0" anchor="ctr"/>
+          <a:lstStyle/>
+          <a:p>
+            <a:pPr algn="ctr"/>
+            <a:endParaRPr lang="en-US"/>
+          </a:p>
+        </p:txBody>
+      </p:sp>
+      <p:sp>
+        <p:nvSpPr>
+          <p:cNvPr id="100" name="Rectangle 99">
+            <a:extLst>
+              <a:ext uri="{FF2B5EF4-FFF2-40B4-BE49-F238E27FC236}">
+                <a16:creationId xmlns:a16="http://schemas.microsoft.com/office/drawing/2014/main" id="{B06949AE-010D-4C18-8AED-7872085ADD57}"/>
+              </a:ext>
+              <a:ext uri="{C183D7F6-B498-43B3-948B-1728B52AA6E4}">
+                <adec:decorative xmlns:adec="http://schemas.microsoft.com/office/drawing/2017/decorative" val="1"/>
+              </a:ext>
+            </a:extLst>
+          </p:cNvPr>
+          <p:cNvSpPr>
+            <a:spLocks noGrp="1" noRot="1" noChangeAspect="1" noMove="1" noResize="1" noEditPoints="1" noAdjustHandles="1" noChangeArrowheads="1" noChangeShapeType="1" noTextEdit="1"/>
+          </p:cNvSpPr>
+          <p:nvPr>
+            <p:extLst>
+              <p:ext uri="{386F3935-93C4-4BCD-93E2-E3B085C9AB24}">
+                <p16:designElem xmlns:p16="http://schemas.microsoft.com/office/powerpoint/2015/main" val="1"/>
+              </p:ext>
+            </p:extLst>
+          </p:nvPr>
+        </p:nvSpPr>
+        <p:spPr>
+          <a:xfrm>
+            <a:off x="477012" y="487090"/>
+            <a:ext cx="5458121" cy="5897880"/>
+          </a:xfrm>
+          <a:prstGeom prst="rect">
+            <a:avLst/>
+          </a:prstGeom>
+          <a:solidFill>
+            <a:srgbClr val="FFFFFF"/>
+          </a:solidFill>
+          <a:ln w="19050">
+            <a:solidFill>
+              <a:srgbClr val="1AD8E4"/>
+            </a:solidFill>
+          </a:ln>
+        </p:spPr>
+        <p:style>
+          <a:lnRef idx="2">
+            <a:schemeClr val="accent1">
+              <a:shade val="50000"/>
+            </a:schemeClr>
+          </a:lnRef>
+          <a:fillRef idx="1">
+            <a:schemeClr val="accent1"/>
+          </a:fillRef>
+          <a:effectRef idx="0">
+            <a:schemeClr val="accent1"/>
+          </a:effectRef>
+          <a:fontRef idx="minor">
+            <a:schemeClr val="lt1"/>
+          </a:fontRef>
+        </p:style>
+        <p:txBody>
+          <a:bodyPr rtlCol="0" anchor="ctr"/>
+          <a:lstStyle/>
+          <a:p>
+            <a:pPr algn="ctr"/>
+            <a:endParaRPr lang="en-US"/>
+          </a:p>
+        </p:txBody>
+      </p:sp>
       <p:pic>
         <p:nvPicPr>
           <p:cNvPr id="92" name="Picture 2"/>
@@ -7983,17 +8772,79 @@
         </p:blipFill>
         <p:spPr>
           <a:xfrm>
-            <a:off x="263520" y="624960"/>
-            <a:ext cx="5189040" cy="5608080"/>
-          </a:xfrm>
-          <a:prstGeom prst="rect">
-            <a:avLst/>
-          </a:prstGeom>
-          <a:ln w="0">
-            <a:noFill/>
-          </a:ln>
+            <a:off x="641180" y="663174"/>
+            <a:ext cx="5129784" cy="5545712"/>
+          </a:xfrm>
+          <a:prstGeom prst="rect">
+            <a:avLst/>
+          </a:prstGeom>
         </p:spPr>
       </p:pic>
+      <p:sp>
+        <p:nvSpPr>
+          <p:cNvPr id="102" name="Rectangle 101">
+            <a:extLst>
+              <a:ext uri="{FF2B5EF4-FFF2-40B4-BE49-F238E27FC236}">
+                <a16:creationId xmlns:a16="http://schemas.microsoft.com/office/drawing/2014/main" id="{FE54AADB-50C7-4293-94C0-27361A32B8CF}"/>
+              </a:ext>
+              <a:ext uri="{C183D7F6-B498-43B3-948B-1728B52AA6E4}">
+                <adec:decorative xmlns:adec="http://schemas.microsoft.com/office/drawing/2017/decorative" val="1"/>
+              </a:ext>
+            </a:extLst>
+          </p:cNvPr>
+          <p:cNvSpPr>
+            <a:spLocks noGrp="1" noRot="1" noChangeAspect="1" noMove="1" noResize="1" noEditPoints="1" noAdjustHandles="1" noChangeArrowheads="1" noChangeShapeType="1" noTextEdit="1"/>
+          </p:cNvSpPr>
+          <p:nvPr>
+            <p:extLst>
+              <p:ext uri="{386F3935-93C4-4BCD-93E2-E3B085C9AB24}">
+                <p16:designElem xmlns:p16="http://schemas.microsoft.com/office/powerpoint/2015/main" val="1"/>
+              </p:ext>
+            </p:extLst>
+          </p:nvPr>
+        </p:nvSpPr>
+        <p:spPr>
+          <a:xfrm>
+            <a:off x="6256866" y="480060"/>
+            <a:ext cx="5458121" cy="5897880"/>
+          </a:xfrm>
+          <a:prstGeom prst="rect">
+            <a:avLst/>
+          </a:prstGeom>
+          <a:solidFill>
+            <a:srgbClr val="FFFFFF"/>
+          </a:solidFill>
+          <a:ln w="19050">
+            <a:solidFill>
+              <a:srgbClr val="1AD8E4"/>
+            </a:solidFill>
+          </a:ln>
+        </p:spPr>
+        <p:style>
+          <a:lnRef idx="2">
+            <a:schemeClr val="accent1">
+              <a:shade val="50000"/>
+            </a:schemeClr>
+          </a:lnRef>
+          <a:fillRef idx="1">
+            <a:schemeClr val="accent1"/>
+          </a:fillRef>
+          <a:effectRef idx="0">
+            <a:schemeClr val="accent1"/>
+          </a:effectRef>
+          <a:fontRef idx="minor">
+            <a:schemeClr val="lt1"/>
+          </a:fontRef>
+        </p:style>
+        <p:txBody>
+          <a:bodyPr rtlCol="0" anchor="ctr"/>
+          <a:lstStyle/>
+          <a:p>
+            <a:pPr algn="ctr"/>
+            <a:endParaRPr lang="en-US"/>
+          </a:p>
+        </p:txBody>
+      </p:sp>
       <p:pic>
         <p:nvPicPr>
           <p:cNvPr id="93" name="Picture 4"/>
@@ -8006,15 +8857,12 @@
         </p:blipFill>
         <p:spPr>
           <a:xfrm>
-            <a:off x="5606280" y="624960"/>
-            <a:ext cx="6585480" cy="6078960"/>
-          </a:xfrm>
-          <a:prstGeom prst="rect">
-            <a:avLst/>
-          </a:prstGeom>
-          <a:ln w="0">
-            <a:noFill/>
-          </a:ln>
+            <a:off x="6421034" y="1062887"/>
+            <a:ext cx="5129784" cy="4732225"/>
+          </a:xfrm>
+          <a:prstGeom prst="rect">
+            <a:avLst/>
+          </a:prstGeom>
         </p:spPr>
       </p:pic>
     </p:spTree>

--- a/Output/Planulae_plots.pptx
+++ b/Output/Planulae_plots.pptx
@@ -206,7 +206,7 @@
           <a:p>
             <a:fld id="{248A16A9-D1F8-4908-973D-8146AEB9CADB}" type="datetimeFigureOut">
               <a:rPr lang="LID4096" smtClean="0"/>
-              <a:t>02/06/2026</a:t>
+              <a:t>02/20/2026</a:t>
             </a:fld>
             <a:endParaRPr lang="LID4096"/>
           </a:p>
@@ -7609,46 +7609,6 @@
           </a:p>
         </p:txBody>
       </p:sp>
-      <p:sp>
-        <p:nvSpPr>
-          <p:cNvPr id="85" name="Straight Connector 15"/>
-          <p:cNvSpPr/>
-          <p:nvPr/>
-        </p:nvSpPr>
-        <p:spPr>
-          <a:xfrm>
-            <a:off x="6079680" y="1143000"/>
-            <a:ext cx="360" cy="4572000"/>
-          </a:xfrm>
-          <a:prstGeom prst="line">
-            <a:avLst/>
-          </a:prstGeom>
-          <a:ln>
-            <a:solidFill>
-              <a:srgbClr val="4E4E4E"/>
-            </a:solidFill>
-          </a:ln>
-        </p:spPr>
-        <p:style>
-          <a:lnRef idx="1">
-            <a:schemeClr val="accent1"/>
-          </a:lnRef>
-          <a:fillRef idx="0">
-            <a:schemeClr val="accent1"/>
-          </a:fillRef>
-          <a:effectRef idx="0">
-            <a:schemeClr val="accent1"/>
-          </a:effectRef>
-          <a:fontRef idx="minor"/>
-        </p:style>
-        <p:txBody>
-          <a:bodyPr/>
-          <a:lstStyle/>
-          <a:p>
-            <a:endParaRPr lang="LID4096"/>
-          </a:p>
-        </p:txBody>
-      </p:sp>
       <p:pic>
         <p:nvPicPr>
           <p:cNvPr id="3" name="Picture 2">
@@ -7677,7 +7637,7 @@
         </p:blipFill>
         <p:spPr>
           <a:xfrm>
-            <a:off x="6221880" y="685614"/>
+            <a:off x="6521906" y="772241"/>
             <a:ext cx="4572009" cy="5486411"/>
           </a:xfrm>
           <a:prstGeom prst="rect">
@@ -7713,7 +7673,7 @@
         </p:blipFill>
         <p:spPr>
           <a:xfrm>
-            <a:off x="862050" y="2377440"/>
+            <a:off x="862049" y="1944302"/>
             <a:ext cx="4740630" cy="2370315"/>
           </a:xfrm>
           <a:prstGeom prst="rect">
@@ -7756,7 +7716,7 @@
       </p:grpSpPr>
       <p:sp>
         <p:nvSpPr>
-          <p:cNvPr id="99" name="Rectangle 98">
+          <p:cNvPr id="112" name="Rectangle 111">
             <a:extLst>
               <a:ext uri="{FF2B5EF4-FFF2-40B4-BE49-F238E27FC236}">
                 <a16:creationId xmlns:a16="http://schemas.microsoft.com/office/drawing/2014/main" id="{664E23E2-7440-4E36-A67B-0F88C5F7E185}"/>
@@ -7823,7 +7783,7 @@
       </p:sp>
       <p:sp>
         <p:nvSpPr>
-          <p:cNvPr id="100" name="Rectangle 99">
+          <p:cNvPr id="113" name="Rectangle 112">
             <a:extLst>
               <a:ext uri="{FF2B5EF4-FFF2-40B4-BE49-F238E27FC236}">
                 <a16:creationId xmlns:a16="http://schemas.microsoft.com/office/drawing/2014/main" id="{B06949AE-010D-4C18-8AED-7872085ADD57}"/>
@@ -7857,7 +7817,7 @@
           </a:solidFill>
           <a:ln w="19050">
             <a:solidFill>
-              <a:srgbClr val="549A54"/>
+              <a:srgbClr val="539E53"/>
             </a:solidFill>
           </a:ln>
         </p:spPr>
@@ -7908,7 +7868,7 @@
       </p:pic>
       <p:sp>
         <p:nvSpPr>
-          <p:cNvPr id="101" name="Rectangle 100">
+          <p:cNvPr id="114" name="Rectangle 113">
             <a:extLst>
               <a:ext uri="{FF2B5EF4-FFF2-40B4-BE49-F238E27FC236}">
                 <a16:creationId xmlns:a16="http://schemas.microsoft.com/office/drawing/2014/main" id="{FE54AADB-50C7-4293-94C0-27361A32B8CF}"/>
@@ -7942,7 +7902,7 @@
           </a:solidFill>
           <a:ln w="19050">
             <a:solidFill>
-              <a:srgbClr val="549A54"/>
+              <a:srgbClr val="539E53"/>
             </a:solidFill>
           </a:ln>
         </p:spPr>
@@ -8899,7 +8859,7 @@
         <p:spPr>
           <a:xfrm>
             <a:off x="3307680" y="457200"/>
-            <a:ext cx="5607720" cy="346320"/>
+            <a:ext cx="6433086" cy="346320"/>
           </a:xfrm>
           <a:prstGeom prst="rect">
             <a:avLst/>
@@ -8916,10 +8876,10 @@
           <a:lstStyle/>
           <a:p>
             <a:r>
-              <a:rPr lang="en-US" sz="1800" b="0" strike="noStrike" spc="-1">
+              <a:rPr lang="en-US" sz="1800" b="0" strike="noStrike" spc="-1" dirty="0">
                 <a:latin typeface="Arial"/>
               </a:rPr>
-              <a:t>Top 10 GO slims enriched in high fluorescence morph</a:t>
+              <a:t>Top 10 GO slims enriched in HF morph</a:t>
             </a:r>
           </a:p>
         </p:txBody>
